--- a/presentation/Cyberpunk_NLP_Presentation.pptx
+++ b/presentation/Cyberpunk_NLP_Presentation.pptx
@@ -8,7 +8,7 @@
     <p:notesMasterId r:id="rId17"/>
   </p:notesMasterIdLst>
   <p:sldIdLst>
-    <p:sldId id="256" r:id="rId2"/>
+    <p:sldId id="274" r:id="rId2"/>
     <p:sldId id="257" r:id="rId3"/>
     <p:sldId id="258" r:id="rId4"/>
     <p:sldId id="259" r:id="rId5"/>
@@ -18,7 +18,7 @@
     <p:sldId id="263" r:id="rId9"/>
     <p:sldId id="264" r:id="rId10"/>
     <p:sldId id="265" r:id="rId11"/>
-    <p:sldId id="266" r:id="rId12"/>
+    <p:sldId id="273" r:id="rId12"/>
     <p:sldId id="267" r:id="rId13"/>
     <p:sldId id="268" r:id="rId14"/>
     <p:sldId id="269" r:id="rId15"/>
@@ -4009,7 +4009,7 @@
                 <a:ea typeface="Arial" pitchFamily="34" charset="-122"/>
                 <a:cs typeface="Arial" pitchFamily="34" charset="-120"/>
               </a:rPr>
-              <a:t>15 NLP methods  from tokenization to Retrieval-Augmented Generation  applied to real player reviews</a:t>
+              <a:t>15 NLP methods from tokenization to Retrieval-Augmented Generation applied to real player reviews</a:t>
             </a:r>
             <a:endParaRPr lang="en-US" sz="1400" dirty="0"/>
           </a:p>
@@ -4163,7 +4163,7 @@
                 <a:ea typeface="Arial" pitchFamily="34" charset="-122"/>
                 <a:cs typeface="Arial" pitchFamily="34" charset="-120"/>
               </a:rPr>
-              <a:t>1.  Alister Charles</a:t>
+              <a:t>3017674 : Alister Charles</a:t>
             </a:r>
             <a:endParaRPr lang="en-US" sz="1700" dirty="0"/>
           </a:p>
@@ -4183,7 +4183,7 @@
                 <a:ea typeface="Arial" pitchFamily="34" charset="-122"/>
                 <a:cs typeface="Arial" pitchFamily="34" charset="-120"/>
               </a:rPr>
-              <a:t>2.  Aryan Jadhav</a:t>
+              <a:t>3017273 : Aryan Jadhav</a:t>
             </a:r>
             <a:endParaRPr lang="en-US" sz="1700" dirty="0"/>
           </a:p>
@@ -4213,7 +4213,73 @@
           </a:prstGeom>
         </p:spPr>
       </p:pic>
+      <p:sp>
+        <p:nvSpPr>
+          <p:cNvPr id="20" name="SupervisorCredit">
+            <a:extLst>
+              <a:ext uri="{FF2B5EF4-FFF2-40B4-BE49-F238E27FC236}">
+                <a16:creationId xmlns:a16="http://schemas.microsoft.com/office/drawing/2014/main" id="{C299B108-951F-6441-ADC8-3C6FEBC93EC3}"/>
+              </a:ext>
+            </a:extLst>
+          </p:cNvPr>
+          <p:cNvSpPr txBox="1"/>
+          <p:nvPr/>
+        </p:nvSpPr>
+        <p:spPr>
+          <a:xfrm>
+            <a:off x="825500" y="5969000"/>
+            <a:ext cx="5486400" cy="507831"/>
+          </a:xfrm>
+          <a:prstGeom prst="rect">
+            <a:avLst/>
+          </a:prstGeom>
+          <a:noFill/>
+        </p:spPr>
+        <p:txBody>
+          <a:bodyPr vertOverflow="overflow" vert="horz" wrap="square" rtlCol="0" anchor="t">
+            <a:spAutoFit/>
+          </a:bodyPr>
+          <a:lstStyle/>
+          <a:p>
+            <a:pPr marL="0" indent="0">
+              <a:buNone/>
+            </a:pPr>
+            <a:r>
+              <a:rPr lang="en-US" sz="1000" b="1" kern="0" spc="300" dirty="0">
+                <a:solidFill>
+                  <a:srgbClr val="22D3EE"/>
+                </a:solidFill>
+                <a:latin typeface="Arial" pitchFamily="34" charset="0"/>
+                <a:ea typeface="Arial" pitchFamily="34" charset="-122"/>
+                <a:cs typeface="Arial" pitchFamily="34" charset="-120"/>
+              </a:rPr>
+              <a:t>SUPERVISED BY</a:t>
+            </a:r>
+          </a:p>
+          <a:p>
+            <a:pPr marL="0" indent="0">
+              <a:buNone/>
+            </a:pPr>
+            <a:r>
+              <a:rPr lang="en-US" sz="1700" b="1" dirty="0">
+                <a:solidFill>
+                  <a:srgbClr val="E2E8F0"/>
+                </a:solidFill>
+                <a:latin typeface="Arial" pitchFamily="34" charset="0"/>
+                <a:ea typeface="Arial" pitchFamily="34" charset="-122"/>
+                <a:cs typeface="Arial" pitchFamily="34" charset="-120"/>
+              </a:rPr>
+              <a:t>Prof. Dr. W. Bantel</a:t>
+            </a:r>
+          </a:p>
+        </p:txBody>
+      </p:sp>
     </p:spTree>
+    <p:extLst>
+      <p:ext uri="{BB962C8B-B14F-4D97-AF65-F5344CB8AC3E}">
+        <p14:creationId xmlns:p14="http://schemas.microsoft.com/office/powerpoint/2010/main" val="3888151894"/>
+      </p:ext>
+    </p:extLst>
   </p:cSld>
   <p:clrMapOvr>
     <a:masterClrMapping/>
@@ -5118,7 +5184,7 @@
                 <a:ea typeface="Arial" pitchFamily="34" charset="-122"/>
                 <a:cs typeface="Arial" pitchFamily="34" charset="-120"/>
               </a:rPr>
-              <a:t>Fully interpretable  but 95/5 class imbalance caps negative recall at 0.40 (a data property, not a model failure).</a:t>
+              <a:t>Fully interpretable but 95/5 class imbalance caps negative recall at 0.40 (a data property, not a model failure).</a:t>
             </a:r>
             <a:endParaRPr lang="en-US" sz="1250" dirty="0"/>
           </a:p>
@@ -5679,8 +5745,8 @@
         </p:nvSpPr>
         <p:spPr>
           <a:xfrm>
-            <a:off x="594360" y="1554480"/>
-            <a:ext cx="2240280" cy="2286000"/>
+            <a:off x="8077200" y="1333500"/>
+            <a:ext cx="3517900" cy="1371600"/>
           </a:xfrm>
           <a:prstGeom prst="roundRect">
             <a:avLst>
@@ -5713,8 +5779,8 @@
         </p:nvSpPr>
         <p:spPr>
           <a:xfrm>
-            <a:off x="731520" y="1691640"/>
-            <a:ext cx="1965960" cy="274320"/>
+            <a:off x="8229600" y="1346200"/>
+            <a:ext cx="3213100" cy="274320"/>
           </a:xfrm>
           <a:prstGeom prst="rect">
             <a:avLst/>
@@ -5752,8 +5818,8 @@
         </p:nvSpPr>
         <p:spPr>
           <a:xfrm>
-            <a:off x="850392" y="2103120"/>
-            <a:ext cx="868680" cy="402336"/>
+            <a:off x="8229600" y="1574800"/>
+            <a:ext cx="1549400" cy="355600"/>
           </a:xfrm>
           <a:prstGeom prst="roundRect">
             <a:avLst>
@@ -5786,8 +5852,8 @@
         </p:nvSpPr>
         <p:spPr>
           <a:xfrm>
-            <a:off x="850392" y="2103120"/>
-            <a:ext cx="868680" cy="402336"/>
+            <a:off x="8229600" y="1574800"/>
+            <a:ext cx="1549400" cy="355600"/>
           </a:xfrm>
           <a:prstGeom prst="rect">
             <a:avLst/>
@@ -5825,8 +5891,8 @@
         </p:nvSpPr>
         <p:spPr>
           <a:xfrm>
-            <a:off x="1764792" y="2103120"/>
-            <a:ext cx="868680" cy="402336"/>
+            <a:off x="9880600" y="1574800"/>
+            <a:ext cx="1549400" cy="355600"/>
           </a:xfrm>
           <a:prstGeom prst="roundRect">
             <a:avLst>
@@ -5859,8 +5925,8 @@
         </p:nvSpPr>
         <p:spPr>
           <a:xfrm>
-            <a:off x="1764792" y="2103120"/>
-            <a:ext cx="868680" cy="402336"/>
+            <a:off x="9880600" y="1574800"/>
+            <a:ext cx="1549400" cy="355600"/>
           </a:xfrm>
           <a:prstGeom prst="rect">
             <a:avLst/>
@@ -5898,8 +5964,8 @@
         </p:nvSpPr>
         <p:spPr>
           <a:xfrm>
-            <a:off x="850392" y="2670048"/>
-            <a:ext cx="868680" cy="402336"/>
+            <a:off x="8229600" y="1943100"/>
+            <a:ext cx="1549400" cy="355600"/>
           </a:xfrm>
           <a:prstGeom prst="roundRect">
             <a:avLst>
@@ -5932,8 +5998,8 @@
         </p:nvSpPr>
         <p:spPr>
           <a:xfrm>
-            <a:off x="850392" y="2670048"/>
-            <a:ext cx="868680" cy="402336"/>
+            <a:off x="8229600" y="1943100"/>
+            <a:ext cx="1549400" cy="355600"/>
           </a:xfrm>
           <a:prstGeom prst="rect">
             <a:avLst/>
@@ -5971,8 +6037,8 @@
         </p:nvSpPr>
         <p:spPr>
           <a:xfrm>
-            <a:off x="1764792" y="2670048"/>
-            <a:ext cx="868680" cy="402336"/>
+            <a:off x="9880600" y="1943100"/>
+            <a:ext cx="1549400" cy="355600"/>
           </a:xfrm>
           <a:prstGeom prst="roundRect">
             <a:avLst>
@@ -6005,8 +6071,8 @@
         </p:nvSpPr>
         <p:spPr>
           <a:xfrm>
-            <a:off x="1764792" y="2670048"/>
-            <a:ext cx="868680" cy="402336"/>
+            <a:off x="9880600" y="1943100"/>
+            <a:ext cx="1549400" cy="355600"/>
           </a:xfrm>
           <a:prstGeom prst="rect">
             <a:avLst/>
@@ -6044,8 +6110,8 @@
         </p:nvSpPr>
         <p:spPr>
           <a:xfrm>
-            <a:off x="850392" y="3236976"/>
-            <a:ext cx="868680" cy="402336"/>
+            <a:off x="8229600" y="2311400"/>
+            <a:ext cx="1549400" cy="355600"/>
           </a:xfrm>
           <a:prstGeom prst="roundRect">
             <a:avLst>
@@ -6078,8 +6144,8 @@
         </p:nvSpPr>
         <p:spPr>
           <a:xfrm>
-            <a:off x="850392" y="3236976"/>
-            <a:ext cx="868680" cy="402336"/>
+            <a:off x="8229600" y="2311400"/>
+            <a:ext cx="1549400" cy="355600"/>
           </a:xfrm>
           <a:prstGeom prst="rect">
             <a:avLst/>
@@ -6117,8 +6183,8 @@
         </p:nvSpPr>
         <p:spPr>
           <a:xfrm>
-            <a:off x="2990088" y="1554480"/>
-            <a:ext cx="2240280" cy="2286000"/>
+            <a:off x="8077200" y="2768600"/>
+            <a:ext cx="3517900" cy="990600"/>
           </a:xfrm>
           <a:prstGeom prst="roundRect">
             <a:avLst>
@@ -6151,8 +6217,8 @@
         </p:nvSpPr>
         <p:spPr>
           <a:xfrm>
-            <a:off x="3127248" y="1691640"/>
-            <a:ext cx="1965960" cy="274320"/>
+            <a:off x="8229600" y="2781300"/>
+            <a:ext cx="3213100" cy="274320"/>
           </a:xfrm>
           <a:prstGeom prst="rect">
             <a:avLst/>
@@ -6190,8 +6256,8 @@
         </p:nvSpPr>
         <p:spPr>
           <a:xfrm>
-            <a:off x="3246120" y="2103120"/>
-            <a:ext cx="868680" cy="402336"/>
+            <a:off x="8229600" y="3035300"/>
+            <a:ext cx="1549400" cy="355600"/>
           </a:xfrm>
           <a:prstGeom prst="roundRect">
             <a:avLst>
@@ -6224,8 +6290,8 @@
         </p:nvSpPr>
         <p:spPr>
           <a:xfrm>
-            <a:off x="3246120" y="2103120"/>
-            <a:ext cx="868680" cy="402336"/>
+            <a:off x="8229600" y="3035300"/>
+            <a:ext cx="1549400" cy="355600"/>
           </a:xfrm>
           <a:prstGeom prst="rect">
             <a:avLst/>
@@ -6263,8 +6329,8 @@
         </p:nvSpPr>
         <p:spPr>
           <a:xfrm>
-            <a:off x="4160520" y="2103120"/>
-            <a:ext cx="868680" cy="402336"/>
+            <a:off x="9880600" y="3035300"/>
+            <a:ext cx="1549400" cy="355600"/>
           </a:xfrm>
           <a:prstGeom prst="roundRect">
             <a:avLst>
@@ -6297,8 +6363,8 @@
         </p:nvSpPr>
         <p:spPr>
           <a:xfrm>
-            <a:off x="4160520" y="2103120"/>
-            <a:ext cx="868680" cy="402336"/>
+            <a:off x="9880600" y="3035300"/>
+            <a:ext cx="1549400" cy="355600"/>
           </a:xfrm>
           <a:prstGeom prst="rect">
             <a:avLst/>
@@ -6336,8 +6402,8 @@
         </p:nvSpPr>
         <p:spPr>
           <a:xfrm>
-            <a:off x="3246120" y="2670048"/>
-            <a:ext cx="868680" cy="402336"/>
+            <a:off x="8229600" y="3390900"/>
+            <a:ext cx="1549400" cy="355600"/>
           </a:xfrm>
           <a:prstGeom prst="roundRect">
             <a:avLst>
@@ -6370,8 +6436,8 @@
         </p:nvSpPr>
         <p:spPr>
           <a:xfrm>
-            <a:off x="3246120" y="2670048"/>
-            <a:ext cx="868680" cy="402336"/>
+            <a:off x="8229600" y="3390900"/>
+            <a:ext cx="1549400" cy="355600"/>
           </a:xfrm>
           <a:prstGeom prst="rect">
             <a:avLst/>
@@ -6409,8 +6475,8 @@
         </p:nvSpPr>
         <p:spPr>
           <a:xfrm>
-            <a:off x="4160520" y="2670048"/>
-            <a:ext cx="868680" cy="402336"/>
+            <a:off x="9880600" y="3390900"/>
+            <a:ext cx="1549400" cy="355600"/>
           </a:xfrm>
           <a:prstGeom prst="roundRect">
             <a:avLst>
@@ -6443,8 +6509,8 @@
         </p:nvSpPr>
         <p:spPr>
           <a:xfrm>
-            <a:off x="4160520" y="2670048"/>
-            <a:ext cx="868680" cy="402336"/>
+            <a:off x="9880600" y="3390900"/>
+            <a:ext cx="1549400" cy="355600"/>
           </a:xfrm>
           <a:prstGeom prst="rect">
             <a:avLst/>
@@ -6482,8 +6548,8 @@
         </p:nvSpPr>
         <p:spPr>
           <a:xfrm>
-            <a:off x="5385816" y="1554480"/>
-            <a:ext cx="2240280" cy="2286000"/>
+            <a:off x="8077200" y="3810000"/>
+            <a:ext cx="3517900" cy="990600"/>
           </a:xfrm>
           <a:prstGeom prst="roundRect">
             <a:avLst>
@@ -6516,8 +6582,8 @@
         </p:nvSpPr>
         <p:spPr>
           <a:xfrm>
-            <a:off x="5522976" y="1691640"/>
-            <a:ext cx="1965960" cy="274320"/>
+            <a:off x="8229600" y="3822700"/>
+            <a:ext cx="3213100" cy="274320"/>
           </a:xfrm>
           <a:prstGeom prst="rect">
             <a:avLst/>
@@ -6555,8 +6621,8 @@
         </p:nvSpPr>
         <p:spPr>
           <a:xfrm>
-            <a:off x="5641848" y="2103120"/>
-            <a:ext cx="868680" cy="402336"/>
+            <a:off x="8229600" y="4076700"/>
+            <a:ext cx="1549400" cy="355600"/>
           </a:xfrm>
           <a:prstGeom prst="roundRect">
             <a:avLst>
@@ -6589,8 +6655,8 @@
         </p:nvSpPr>
         <p:spPr>
           <a:xfrm>
-            <a:off x="5641848" y="2103120"/>
-            <a:ext cx="868680" cy="402336"/>
+            <a:off x="8229600" y="4076700"/>
+            <a:ext cx="1549400" cy="355600"/>
           </a:xfrm>
           <a:prstGeom prst="rect">
             <a:avLst/>
@@ -6628,8 +6694,8 @@
         </p:nvSpPr>
         <p:spPr>
           <a:xfrm>
-            <a:off x="6556248" y="2103120"/>
-            <a:ext cx="868680" cy="402336"/>
+            <a:off x="9880600" y="4076700"/>
+            <a:ext cx="1549400" cy="355600"/>
           </a:xfrm>
           <a:prstGeom prst="roundRect">
             <a:avLst>
@@ -6662,8 +6728,8 @@
         </p:nvSpPr>
         <p:spPr>
           <a:xfrm>
-            <a:off x="6556248" y="2103120"/>
-            <a:ext cx="868680" cy="402336"/>
+            <a:off x="9880600" y="4076700"/>
+            <a:ext cx="1549400" cy="355600"/>
           </a:xfrm>
           <a:prstGeom prst="rect">
             <a:avLst/>
@@ -6701,8 +6767,8 @@
         </p:nvSpPr>
         <p:spPr>
           <a:xfrm>
-            <a:off x="5641848" y="2670048"/>
-            <a:ext cx="868680" cy="402336"/>
+            <a:off x="8229600" y="4432300"/>
+            <a:ext cx="1549400" cy="355600"/>
           </a:xfrm>
           <a:prstGeom prst="roundRect">
             <a:avLst>
@@ -6735,8 +6801,8 @@
         </p:nvSpPr>
         <p:spPr>
           <a:xfrm>
-            <a:off x="5641848" y="2670048"/>
-            <a:ext cx="868680" cy="402336"/>
+            <a:off x="8229600" y="4432300"/>
+            <a:ext cx="1549400" cy="355600"/>
           </a:xfrm>
           <a:prstGeom prst="rect">
             <a:avLst/>
@@ -6774,8 +6840,8 @@
         </p:nvSpPr>
         <p:spPr>
           <a:xfrm>
-            <a:off x="6556248" y="2670048"/>
-            <a:ext cx="868680" cy="402336"/>
+            <a:off x="9880600" y="4432300"/>
+            <a:ext cx="1549400" cy="355600"/>
           </a:xfrm>
           <a:prstGeom prst="roundRect">
             <a:avLst>
@@ -6808,8 +6874,8 @@
         </p:nvSpPr>
         <p:spPr>
           <a:xfrm>
-            <a:off x="6556248" y="2670048"/>
-            <a:ext cx="868680" cy="402336"/>
+            <a:off x="9880600" y="4432300"/>
+            <a:ext cx="1549400" cy="355600"/>
           </a:xfrm>
           <a:prstGeom prst="rect">
             <a:avLst/>
@@ -6847,8 +6913,8 @@
         </p:nvSpPr>
         <p:spPr>
           <a:xfrm>
-            <a:off x="594360" y="4114800"/>
-            <a:ext cx="7132320" cy="1417320"/>
+            <a:off x="8077200" y="4838700"/>
+            <a:ext cx="3517900" cy="838200"/>
           </a:xfrm>
           <a:prstGeom prst="roundRect">
             <a:avLst>
@@ -6889,8 +6955,8 @@
         </p:blipFill>
         <p:spPr>
           <a:xfrm>
-            <a:off x="868680" y="4526280"/>
-            <a:ext cx="411480" cy="411480"/>
+            <a:off x="8204200" y="4876800"/>
+            <a:ext cx="203200" cy="203200"/>
           </a:xfrm>
           <a:prstGeom prst="rect">
             <a:avLst/>
@@ -6905,8 +6971,8 @@
         </p:nvSpPr>
         <p:spPr>
           <a:xfrm>
-            <a:off x="1508760" y="4251960"/>
-            <a:ext cx="3657600" cy="237744"/>
+            <a:off x="8483600" y="4864100"/>
+            <a:ext cx="3048000" cy="237744"/>
           </a:xfrm>
           <a:prstGeom prst="rect">
             <a:avLst/>
@@ -6944,8 +7010,8 @@
         </p:nvSpPr>
         <p:spPr>
           <a:xfrm>
-            <a:off x="1508760" y="4526280"/>
-            <a:ext cx="6035040" cy="914400"/>
+            <a:off x="8204200" y="4907280"/>
+            <a:ext cx="3327400" cy="914400"/>
           </a:xfrm>
           <a:prstGeom prst="rect">
             <a:avLst/>
@@ -6959,12 +7025,12 @@
           <a:p>
             <a:pPr marL="0" indent="0">
               <a:lnSpc>
-                <a:spcPts val="1900"/>
+                <a:spcPts val="1000"/>
               </a:lnSpc>
               <a:buNone/>
             </a:pPr>
             <a:r>
-              <a:rPr lang="en-US" sz="1200" b="1" dirty="0">
+              <a:rPr lang="en-US" sz="900" b="1" dirty="0">
                 <a:solidFill>
                   <a:srgbClr val="22D3EE"/>
                 </a:solidFill>
@@ -6974,17 +7040,16 @@
               </a:rPr>
               <a:t>bug + fix − crash ≈ patch</a:t>
             </a:r>
-            <a:endParaRPr lang="en-US" sz="1200" dirty="0"/>
           </a:p>
           <a:p>
             <a:pPr marL="0" indent="0">
               <a:lnSpc>
-                <a:spcPts val="1900"/>
+                <a:spcPts val="1000"/>
               </a:lnSpc>
               <a:buNone/>
             </a:pPr>
             <a:r>
-              <a:rPr lang="en-US" sz="1200" b="1" dirty="0">
+              <a:rPr lang="en-US" sz="900" b="1" dirty="0">
                 <a:solidFill>
                   <a:srgbClr val="22D3EE"/>
                 </a:solidFill>
@@ -6994,17 +7059,16 @@
               </a:rPr>
               <a:t>graphic + good − bad ≈ amazing</a:t>
             </a:r>
-            <a:endParaRPr lang="en-US" sz="1200" dirty="0"/>
           </a:p>
           <a:p>
             <a:pPr marL="0" indent="0">
               <a:lnSpc>
-                <a:spcPts val="1900"/>
+                <a:spcPts val="1000"/>
               </a:lnSpc>
               <a:buNone/>
             </a:pPr>
             <a:r>
-              <a:rPr lang="en-US" sz="1200" b="1" dirty="0">
+              <a:rPr lang="en-US" sz="900" b="1" dirty="0">
                 <a:solidFill>
                   <a:srgbClr val="22D3EE"/>
                 </a:solidFill>
@@ -7014,7 +7078,6 @@
               </a:rPr>
               <a:t>story + excellent − terrible ≈ storyline</a:t>
             </a:r>
-            <a:endParaRPr lang="en-US" sz="1200" dirty="0"/>
           </a:p>
         </p:txBody>
       </p:sp>
@@ -7026,8 +7089,8 @@
         </p:nvSpPr>
         <p:spPr>
           <a:xfrm>
-            <a:off x="7909560" y="1554480"/>
-            <a:ext cx="3685032" cy="3977640"/>
+            <a:off x="596900" y="1225296"/>
+            <a:ext cx="7277100" cy="4464304"/>
           </a:xfrm>
           <a:prstGeom prst="roundRect">
             <a:avLst>
@@ -7068,8 +7131,8 @@
         </p:blipFill>
         <p:spPr>
           <a:xfrm>
-            <a:off x="8092440" y="1737360"/>
-            <a:ext cx="3319272" cy="2258568"/>
+            <a:off x="1435100" y="1371600"/>
+            <a:ext cx="5588000" cy="3810000"/>
           </a:xfrm>
           <a:prstGeom prst="rect">
             <a:avLst/>
@@ -7084,8 +7147,8 @@
         </p:nvSpPr>
         <p:spPr>
           <a:xfrm>
-            <a:off x="8092440" y="4041648"/>
-            <a:ext cx="3337560" cy="457200"/>
+            <a:off x="1417320" y="5132832"/>
+            <a:ext cx="5588000" cy="457200"/>
           </a:xfrm>
           <a:prstGeom prst="rect">
             <a:avLst/>
@@ -7123,8 +7186,8 @@
         </p:nvSpPr>
         <p:spPr>
           <a:xfrm>
-            <a:off x="8092440" y="4892040"/>
-            <a:ext cx="3337560" cy="274320"/>
+            <a:off x="1435100" y="5376672"/>
+            <a:ext cx="5588000" cy="274320"/>
           </a:xfrm>
           <a:prstGeom prst="rect">
             <a:avLst/>
@@ -7341,6 +7404,11 @@
         </p:spPr>
       </p:pic>
     </p:spTree>
+    <p:extLst>
+      <p:ext uri="{BB962C8B-B14F-4D97-AF65-F5344CB8AC3E}">
+        <p14:creationId xmlns:p14="http://schemas.microsoft.com/office/powerpoint/2010/main" val="3384512101"/>
+      </p:ext>
+    </p:extLst>
   </p:cSld>
   <p:clrMapOvr>
     <a:masterClrMapping/>
@@ -12638,7 +12706,7 @@
                 <a:ea typeface="Arial" pitchFamily="34" charset="-122"/>
                 <a:cs typeface="Arial" pitchFamily="34" charset="-120"/>
               </a:rPr>
-              <a:t>Thank you  questions welcome.</a:t>
+              <a:t>Thank you!</a:t>
             </a:r>
             <a:endParaRPr lang="en-US" sz="1350" dirty="0"/>
           </a:p>
@@ -14738,10 +14806,9 @@
                   <a:srgbClr val="94A3B8"/>
                 </a:solidFill>
                 <a:latin typeface="Arial" pitchFamily="34" charset="0"/>
-                <a:ea typeface="Arial" pitchFamily="34" charset="-122"/>
-                <a:cs typeface="Arial" pitchFamily="34" charset="-120"/>
-              </a:rPr>
-              <a:t>cursor-based paging</a:t>
+                <a:cs typeface="Arial" pitchFamily="34" charset="-120"/>
+              </a:rPr>
+              <a:t>Scrapping </a:t>
             </a:r>
             <a:endParaRPr lang="en-US" sz="1050" dirty="0"/>
           </a:p>
@@ -15228,27 +15295,6 @@
                 <a:ea typeface="Arial" pitchFamily="34" charset="-122"/>
                 <a:cs typeface="Arial" pitchFamily="34" charset="-120"/>
               </a:rPr>
-              <a:t>Structured JSON no fragile HTML parsing</a:t>
-            </a:r>
-            <a:endParaRPr lang="en-US" sz="1250" dirty="0"/>
-          </a:p>
-          <a:p>
-            <a:pPr marL="342900" indent="-342900">
-              <a:spcAft>
-                <a:spcPts val="800"/>
-              </a:spcAft>
-              <a:buSzPct val="100000"/>
-              <a:buChar char="•"/>
-            </a:pPr>
-            <a:r>
-              <a:rPr lang="en-US" sz="1250" dirty="0">
-                <a:solidFill>
-                  <a:srgbClr val="E2E8F0"/>
-                </a:solidFill>
-                <a:latin typeface="Arial" pitchFamily="34" charset="0"/>
-                <a:ea typeface="Arial" pitchFamily="34" charset="-122"/>
-                <a:cs typeface="Arial" pitchFamily="34" charset="-120"/>
-              </a:rPr>
               <a:t>Dataset is always current (last fetch: Jul 2026)</a:t>
             </a:r>
             <a:endParaRPr lang="en-US" sz="1250" dirty="0"/>
@@ -15346,7 +15392,7 @@
                 <a:ea typeface="Arial" pitchFamily="34" charset="-122"/>
                 <a:cs typeface="Arial" pitchFamily="34" charset="-120"/>
               </a:rPr>
-              <a:t>LIVE SAMPLE · 2026-07-12</a:t>
+              <a:t>LIVE SAMPLE </a:t>
             </a:r>
             <a:endParaRPr lang="en-US" sz="1000" dirty="0"/>
           </a:p>
@@ -22685,7 +22731,29 @@
                 <a:ea typeface="Arial" pitchFamily="34" charset="-122"/>
                 <a:cs typeface="Arial" pitchFamily="34" charset="-120"/>
               </a:rPr>
-              <a:t>With ngram_range=(1,2) bigrams become tf-idf features  the model can tell “not worth” from “worth”.</a:t>
+              <a:t>With ngram_range=(1,2) bigrams become </a:t>
+            </a:r>
+            <a:r>
+              <a:rPr lang="en-US" sz="1250" dirty="0" err="1">
+                <a:solidFill>
+                  <a:srgbClr val="E2E8F0"/>
+                </a:solidFill>
+                <a:latin typeface="Arial" pitchFamily="34" charset="0"/>
+                <a:ea typeface="Arial" pitchFamily="34" charset="-122"/>
+                <a:cs typeface="Arial" pitchFamily="34" charset="-120"/>
+              </a:rPr>
+              <a:t>tf-idf</a:t>
+            </a:r>
+            <a:r>
+              <a:rPr lang="en-US" sz="1250" dirty="0">
+                <a:solidFill>
+                  <a:srgbClr val="E2E8F0"/>
+                </a:solidFill>
+                <a:latin typeface="Arial" pitchFamily="34" charset="0"/>
+                <a:ea typeface="Arial" pitchFamily="34" charset="-122"/>
+                <a:cs typeface="Arial" pitchFamily="34" charset="-120"/>
+              </a:rPr>
+              <a:t> features the model can tell “not worth” from “worth”.</a:t>
             </a:r>
             <a:endParaRPr lang="en-US" sz="1250" dirty="0"/>
           </a:p>
@@ -23980,7 +24048,7 @@
                 <a:ea typeface="Arial" pitchFamily="34" charset="-122"/>
                 <a:cs typeface="Arial" pitchFamily="34" charset="-120"/>
               </a:rPr>
-              <a:t>“not” is the 2nd-strongest negative term  protecting it from stop-word removal paid off.</a:t>
+              <a:t>“not” is the 2nd-strongest negative term protecting it from stop-word removal paid off.</a:t>
             </a:r>
             <a:endParaRPr lang="en-US" sz="1250" dirty="0"/>
           </a:p>
@@ -24704,4 +24772,26 @@
     </a:ext>
   </a:extLst>
 </a:theme>
+</file>
+
+<file path=ppt/webextensions/taskpanes.xml><?xml version="1.0" encoding="utf-8"?>
+<wetp:taskpanes xmlns:wetp="http://schemas.microsoft.com/office/webextensions/taskpanes/2010/11">
+  <wetp:taskpane dockstate="right" visibility="0" width="350" row="0">
+    <wetp:webextensionref xmlns:r="http://schemas.openxmlformats.org/officeDocument/2006/relationships" r:id="rId1"/>
+  </wetp:taskpane>
+</wetp:taskpanes>
+</file>
+
+<file path=ppt/webextensions/webextension1.xml><?xml version="1.0" encoding="utf-8"?>
+<we:webextension xmlns:we="http://schemas.microsoft.com/office/webextensions/webextension/2010/11" id="{FA92F316-7D73-584E-BB47-DA6858FF67E2}">
+  <we:reference id="WA200010001" version="1.0.0.1" store="Omex" storeType="OMEX"/>
+  <we:alternateReferences>
+    <we:reference id="WA200010001" version="1.0.0.1" store="WA200010001" storeType="OMEX"/>
+  </we:alternateReferences>
+  <we:properties>
+    <we:property name="claude.fileId" value="&quot;0cb1efec-fdbb-4e9b-9d76-4b88be5a66e9&quot;"/>
+  </we:properties>
+  <we:bindings/>
+  <we:snapshot xmlns:r="http://schemas.openxmlformats.org/officeDocument/2006/relationships"/>
+</we:webextension>
 </file>